--- a/ゲーム科2年/00_前期/ゲームエンジンⅢ/バージョン管理/03_Clone.pptx
+++ b/ゲーム科2年/00_前期/ゲームエンジンⅢ/バージョン管理/03_Clone.pptx
@@ -266,7 +266,7 @@
           <a:p>
             <a:fld id="{E9CC885B-4903-4D54-9A93-00025F12DED9}" type="datetimeFigureOut">
               <a:rPr kumimoji="1" lang="ja-JP" altLang="en-US" smtClean="0"/>
-              <a:t>2025/1/15</a:t>
+              <a:t>2025/1/27</a:t>
             </a:fld>
             <a:endParaRPr kumimoji="1" lang="ja-JP" altLang="en-US"/>
           </a:p>
@@ -496,7 +496,7 @@
           <a:p>
             <a:fld id="{E9CC885B-4903-4D54-9A93-00025F12DED9}" type="datetimeFigureOut">
               <a:rPr kumimoji="1" lang="ja-JP" altLang="en-US" smtClean="0"/>
-              <a:t>2025/1/15</a:t>
+              <a:t>2025/1/27</a:t>
             </a:fld>
             <a:endParaRPr kumimoji="1" lang="ja-JP" altLang="en-US"/>
           </a:p>
@@ -736,7 +736,7 @@
           <a:p>
             <a:fld id="{E9CC885B-4903-4D54-9A93-00025F12DED9}" type="datetimeFigureOut">
               <a:rPr kumimoji="1" lang="ja-JP" altLang="en-US" smtClean="0"/>
-              <a:t>2025/1/15</a:t>
+              <a:t>2025/1/27</a:t>
             </a:fld>
             <a:endParaRPr kumimoji="1" lang="ja-JP" altLang="en-US"/>
           </a:p>
@@ -966,7 +966,7 @@
           <a:p>
             <a:fld id="{E9CC885B-4903-4D54-9A93-00025F12DED9}" type="datetimeFigureOut">
               <a:rPr kumimoji="1" lang="ja-JP" altLang="en-US" smtClean="0"/>
-              <a:t>2025/1/15</a:t>
+              <a:t>2025/1/27</a:t>
             </a:fld>
             <a:endParaRPr kumimoji="1" lang="ja-JP" altLang="en-US"/>
           </a:p>
@@ -1241,7 +1241,7 @@
           <a:p>
             <a:fld id="{E9CC885B-4903-4D54-9A93-00025F12DED9}" type="datetimeFigureOut">
               <a:rPr kumimoji="1" lang="ja-JP" altLang="en-US" smtClean="0"/>
-              <a:t>2025/1/15</a:t>
+              <a:t>2025/1/27</a:t>
             </a:fld>
             <a:endParaRPr kumimoji="1" lang="ja-JP" altLang="en-US"/>
           </a:p>
@@ -1570,7 +1570,7 @@
           <a:p>
             <a:fld id="{E9CC885B-4903-4D54-9A93-00025F12DED9}" type="datetimeFigureOut">
               <a:rPr kumimoji="1" lang="ja-JP" altLang="en-US" smtClean="0"/>
-              <a:t>2025/1/15</a:t>
+              <a:t>2025/1/27</a:t>
             </a:fld>
             <a:endParaRPr kumimoji="1" lang="ja-JP" altLang="en-US"/>
           </a:p>
@@ -2046,7 +2046,7 @@
           <a:p>
             <a:fld id="{E9CC885B-4903-4D54-9A93-00025F12DED9}" type="datetimeFigureOut">
               <a:rPr kumimoji="1" lang="ja-JP" altLang="en-US" smtClean="0"/>
-              <a:t>2025/1/15</a:t>
+              <a:t>2025/1/27</a:t>
             </a:fld>
             <a:endParaRPr kumimoji="1" lang="ja-JP" altLang="en-US"/>
           </a:p>
@@ -2187,7 +2187,7 @@
           <a:p>
             <a:fld id="{E9CC885B-4903-4D54-9A93-00025F12DED9}" type="datetimeFigureOut">
               <a:rPr kumimoji="1" lang="ja-JP" altLang="en-US" smtClean="0"/>
-              <a:t>2025/1/15</a:t>
+              <a:t>2025/1/27</a:t>
             </a:fld>
             <a:endParaRPr kumimoji="1" lang="ja-JP" altLang="en-US"/>
           </a:p>
@@ -2300,7 +2300,7 @@
           <a:p>
             <a:fld id="{E9CC885B-4903-4D54-9A93-00025F12DED9}" type="datetimeFigureOut">
               <a:rPr kumimoji="1" lang="ja-JP" altLang="en-US" smtClean="0"/>
-              <a:t>2025/1/15</a:t>
+              <a:t>2025/1/27</a:t>
             </a:fld>
             <a:endParaRPr kumimoji="1" lang="ja-JP" altLang="en-US"/>
           </a:p>
@@ -2643,7 +2643,7 @@
           <a:p>
             <a:fld id="{E9CC885B-4903-4D54-9A93-00025F12DED9}" type="datetimeFigureOut">
               <a:rPr kumimoji="1" lang="ja-JP" altLang="en-US" smtClean="0"/>
-              <a:t>2025/1/15</a:t>
+              <a:t>2025/1/27</a:t>
             </a:fld>
             <a:endParaRPr kumimoji="1" lang="ja-JP" altLang="en-US"/>
           </a:p>
@@ -2931,7 +2931,7 @@
           <a:p>
             <a:fld id="{E9CC885B-4903-4D54-9A93-00025F12DED9}" type="datetimeFigureOut">
               <a:rPr kumimoji="1" lang="ja-JP" altLang="en-US" smtClean="0"/>
-              <a:t>2025/1/15</a:t>
+              <a:t>2025/1/27</a:t>
             </a:fld>
             <a:endParaRPr kumimoji="1" lang="ja-JP" altLang="en-US"/>
           </a:p>
@@ -3204,7 +3204,7 @@
           <a:p>
             <a:fld id="{E9CC885B-4903-4D54-9A93-00025F12DED9}" type="datetimeFigureOut">
               <a:rPr kumimoji="1" lang="ja-JP" altLang="en-US" smtClean="0"/>
-              <a:t>2025/1/15</a:t>
+              <a:t>2025/1/27</a:t>
             </a:fld>
             <a:endParaRPr kumimoji="1" lang="ja-JP" altLang="en-US"/>
           </a:p>
@@ -5424,6 +5424,67 @@
           </a:p>
         </p:txBody>
       </p:sp>
+      <p:sp>
+        <p:nvSpPr>
+          <p:cNvPr id="7" name="テキスト ボックス 6">
+            <a:extLst>
+              <a:ext uri="{FF2B5EF4-FFF2-40B4-BE49-F238E27FC236}">
+                <a16:creationId xmlns:a16="http://schemas.microsoft.com/office/drawing/2014/main" id="{E55E70C3-5BC8-4ECA-B128-7679C7DE7014}"/>
+              </a:ext>
+            </a:extLst>
+          </p:cNvPr>
+          <p:cNvSpPr txBox="1"/>
+          <p:nvPr/>
+        </p:nvSpPr>
+        <p:spPr>
+          <a:xfrm>
+            <a:off x="5978497" y="3440200"/>
+            <a:ext cx="5780750" cy="923330"/>
+          </a:xfrm>
+          <a:prstGeom prst="rect">
+            <a:avLst/>
+          </a:prstGeom>
+          <a:noFill/>
+        </p:spPr>
+        <p:txBody>
+          <a:bodyPr wrap="none" rtlCol="0">
+            <a:spAutoFit/>
+          </a:bodyPr>
+          <a:lstStyle/>
+          <a:p>
+            <a:r>
+              <a:rPr lang="en-US" altLang="ja-JP" b="1" dirty="0">
+                <a:solidFill>
+                  <a:srgbClr val="00B050"/>
+                </a:solidFill>
+              </a:rPr>
+              <a:t>MEMO</a:t>
+            </a:r>
+          </a:p>
+          <a:p>
+            <a:r>
+              <a:rPr lang="en-US" altLang="ja-JP" dirty="0"/>
+              <a:t>Git Bash </a:t>
+            </a:r>
+            <a:r>
+              <a:rPr lang="ja-JP" altLang="en-US" dirty="0"/>
+              <a:t>はこのようにコマンドを文字で打ち込んで、</a:t>
+            </a:r>
+            <a:endParaRPr lang="en-US" altLang="ja-JP" dirty="0"/>
+          </a:p>
+          <a:p>
+            <a:r>
+              <a:rPr lang="en-US" altLang="ja-JP" dirty="0"/>
+              <a:t>Git</a:t>
+            </a:r>
+            <a:r>
+              <a:rPr lang="ja-JP" altLang="en-US" dirty="0"/>
+              <a:t>を操作するものになります。</a:t>
+            </a:r>
+            <a:endParaRPr lang="en-US" altLang="ja-JP" dirty="0"/>
+          </a:p>
+        </p:txBody>
+      </p:sp>
     </p:spTree>
     <p:extLst>
       <p:ext uri="{BB962C8B-B14F-4D97-AF65-F5344CB8AC3E}">

--- a/ゲーム科2年/00_前期/ゲームエンジンⅢ/バージョン管理/03_Clone.pptx
+++ b/ゲーム科2年/00_前期/ゲームエンジンⅢ/バージョン管理/03_Clone.pptx
@@ -266,7 +266,7 @@
           <a:p>
             <a:fld id="{E9CC885B-4903-4D54-9A93-00025F12DED9}" type="datetimeFigureOut">
               <a:rPr kumimoji="1" lang="ja-JP" altLang="en-US" smtClean="0"/>
-              <a:t>2025/1/27</a:t>
+              <a:t>2025/1/15</a:t>
             </a:fld>
             <a:endParaRPr kumimoji="1" lang="ja-JP" altLang="en-US"/>
           </a:p>
@@ -496,7 +496,7 @@
           <a:p>
             <a:fld id="{E9CC885B-4903-4D54-9A93-00025F12DED9}" type="datetimeFigureOut">
               <a:rPr kumimoji="1" lang="ja-JP" altLang="en-US" smtClean="0"/>
-              <a:t>2025/1/27</a:t>
+              <a:t>2025/1/15</a:t>
             </a:fld>
             <a:endParaRPr kumimoji="1" lang="ja-JP" altLang="en-US"/>
           </a:p>
@@ -736,7 +736,7 @@
           <a:p>
             <a:fld id="{E9CC885B-4903-4D54-9A93-00025F12DED9}" type="datetimeFigureOut">
               <a:rPr kumimoji="1" lang="ja-JP" altLang="en-US" smtClean="0"/>
-              <a:t>2025/1/27</a:t>
+              <a:t>2025/1/15</a:t>
             </a:fld>
             <a:endParaRPr kumimoji="1" lang="ja-JP" altLang="en-US"/>
           </a:p>
@@ -966,7 +966,7 @@
           <a:p>
             <a:fld id="{E9CC885B-4903-4D54-9A93-00025F12DED9}" type="datetimeFigureOut">
               <a:rPr kumimoji="1" lang="ja-JP" altLang="en-US" smtClean="0"/>
-              <a:t>2025/1/27</a:t>
+              <a:t>2025/1/15</a:t>
             </a:fld>
             <a:endParaRPr kumimoji="1" lang="ja-JP" altLang="en-US"/>
           </a:p>
@@ -1241,7 +1241,7 @@
           <a:p>
             <a:fld id="{E9CC885B-4903-4D54-9A93-00025F12DED9}" type="datetimeFigureOut">
               <a:rPr kumimoji="1" lang="ja-JP" altLang="en-US" smtClean="0"/>
-              <a:t>2025/1/27</a:t>
+              <a:t>2025/1/15</a:t>
             </a:fld>
             <a:endParaRPr kumimoji="1" lang="ja-JP" altLang="en-US"/>
           </a:p>
@@ -1570,7 +1570,7 @@
           <a:p>
             <a:fld id="{E9CC885B-4903-4D54-9A93-00025F12DED9}" type="datetimeFigureOut">
               <a:rPr kumimoji="1" lang="ja-JP" altLang="en-US" smtClean="0"/>
-              <a:t>2025/1/27</a:t>
+              <a:t>2025/1/15</a:t>
             </a:fld>
             <a:endParaRPr kumimoji="1" lang="ja-JP" altLang="en-US"/>
           </a:p>
@@ -2046,7 +2046,7 @@
           <a:p>
             <a:fld id="{E9CC885B-4903-4D54-9A93-00025F12DED9}" type="datetimeFigureOut">
               <a:rPr kumimoji="1" lang="ja-JP" altLang="en-US" smtClean="0"/>
-              <a:t>2025/1/27</a:t>
+              <a:t>2025/1/15</a:t>
             </a:fld>
             <a:endParaRPr kumimoji="1" lang="ja-JP" altLang="en-US"/>
           </a:p>
@@ -2187,7 +2187,7 @@
           <a:p>
             <a:fld id="{E9CC885B-4903-4D54-9A93-00025F12DED9}" type="datetimeFigureOut">
               <a:rPr kumimoji="1" lang="ja-JP" altLang="en-US" smtClean="0"/>
-              <a:t>2025/1/27</a:t>
+              <a:t>2025/1/15</a:t>
             </a:fld>
             <a:endParaRPr kumimoji="1" lang="ja-JP" altLang="en-US"/>
           </a:p>
@@ -2300,7 +2300,7 @@
           <a:p>
             <a:fld id="{E9CC885B-4903-4D54-9A93-00025F12DED9}" type="datetimeFigureOut">
               <a:rPr kumimoji="1" lang="ja-JP" altLang="en-US" smtClean="0"/>
-              <a:t>2025/1/27</a:t>
+              <a:t>2025/1/15</a:t>
             </a:fld>
             <a:endParaRPr kumimoji="1" lang="ja-JP" altLang="en-US"/>
           </a:p>
@@ -2643,7 +2643,7 @@
           <a:p>
             <a:fld id="{E9CC885B-4903-4D54-9A93-00025F12DED9}" type="datetimeFigureOut">
               <a:rPr kumimoji="1" lang="ja-JP" altLang="en-US" smtClean="0"/>
-              <a:t>2025/1/27</a:t>
+              <a:t>2025/1/15</a:t>
             </a:fld>
             <a:endParaRPr kumimoji="1" lang="ja-JP" altLang="en-US"/>
           </a:p>
@@ -2931,7 +2931,7 @@
           <a:p>
             <a:fld id="{E9CC885B-4903-4D54-9A93-00025F12DED9}" type="datetimeFigureOut">
               <a:rPr kumimoji="1" lang="ja-JP" altLang="en-US" smtClean="0"/>
-              <a:t>2025/1/27</a:t>
+              <a:t>2025/1/15</a:t>
             </a:fld>
             <a:endParaRPr kumimoji="1" lang="ja-JP" altLang="en-US"/>
           </a:p>
@@ -3204,7 +3204,7 @@
           <a:p>
             <a:fld id="{E9CC885B-4903-4D54-9A93-00025F12DED9}" type="datetimeFigureOut">
               <a:rPr kumimoji="1" lang="ja-JP" altLang="en-US" smtClean="0"/>
-              <a:t>2025/1/27</a:t>
+              <a:t>2025/1/15</a:t>
             </a:fld>
             <a:endParaRPr kumimoji="1" lang="ja-JP" altLang="en-US"/>
           </a:p>
@@ -5424,67 +5424,6 @@
           </a:p>
         </p:txBody>
       </p:sp>
-      <p:sp>
-        <p:nvSpPr>
-          <p:cNvPr id="7" name="テキスト ボックス 6">
-            <a:extLst>
-              <a:ext uri="{FF2B5EF4-FFF2-40B4-BE49-F238E27FC236}">
-                <a16:creationId xmlns:a16="http://schemas.microsoft.com/office/drawing/2014/main" id="{E55E70C3-5BC8-4ECA-B128-7679C7DE7014}"/>
-              </a:ext>
-            </a:extLst>
-          </p:cNvPr>
-          <p:cNvSpPr txBox="1"/>
-          <p:nvPr/>
-        </p:nvSpPr>
-        <p:spPr>
-          <a:xfrm>
-            <a:off x="5978497" y="3440200"/>
-            <a:ext cx="5780750" cy="923330"/>
-          </a:xfrm>
-          <a:prstGeom prst="rect">
-            <a:avLst/>
-          </a:prstGeom>
-          <a:noFill/>
-        </p:spPr>
-        <p:txBody>
-          <a:bodyPr wrap="none" rtlCol="0">
-            <a:spAutoFit/>
-          </a:bodyPr>
-          <a:lstStyle/>
-          <a:p>
-            <a:r>
-              <a:rPr lang="en-US" altLang="ja-JP" b="1" dirty="0">
-                <a:solidFill>
-                  <a:srgbClr val="00B050"/>
-                </a:solidFill>
-              </a:rPr>
-              <a:t>MEMO</a:t>
-            </a:r>
-          </a:p>
-          <a:p>
-            <a:r>
-              <a:rPr lang="en-US" altLang="ja-JP" dirty="0"/>
-              <a:t>Git Bash </a:t>
-            </a:r>
-            <a:r>
-              <a:rPr lang="ja-JP" altLang="en-US" dirty="0"/>
-              <a:t>はこのようにコマンドを文字で打ち込んで、</a:t>
-            </a:r>
-            <a:endParaRPr lang="en-US" altLang="ja-JP" dirty="0"/>
-          </a:p>
-          <a:p>
-            <a:r>
-              <a:rPr lang="en-US" altLang="ja-JP" dirty="0"/>
-              <a:t>Git</a:t>
-            </a:r>
-            <a:r>
-              <a:rPr lang="ja-JP" altLang="en-US" dirty="0"/>
-              <a:t>を操作するものになります。</a:t>
-            </a:r>
-            <a:endParaRPr lang="en-US" altLang="ja-JP" dirty="0"/>
-          </a:p>
-        </p:txBody>
-      </p:sp>
     </p:spTree>
     <p:extLst>
       <p:ext uri="{BB962C8B-B14F-4D97-AF65-F5344CB8AC3E}">
